--- a/project_presentation.pptx
+++ b/project_presentation.pptx
@@ -12655,7 +12655,7 @@
                 <a:ea typeface="Calibri" pitchFamily="34" charset="-122"/>
                 <a:cs typeface="Calibri" pitchFamily="34" charset="-120"/>
               </a:rPr>
-              <a:t>0,997</a:t>
+              <a:t>99,7%</a:t>
             </a:r>
             <a:endParaRPr lang="en-US" sz="2600" dirty="0"/>
           </a:p>

--- a/project_presentation.pptx
+++ b/project_presentation.pptx
@@ -5209,10 +5209,10 @@
                 <a:ea typeface="Calibri" pitchFamily="34" charset="-122"/>
                 <a:cs typeface="Calibri" pitchFamily="34" charset="-120"/>
               </a:rPr>
-              <a:t> with 97.9% accuracy and F1, validated via Stratified 5-Fold CV and confirmed statistically superior to Linear SVM (</a:t>
-            </a:r>
-            <a:r>
-              <a:rPr lang="en-US" sz="1200" dirty="0" err="1">
+              <a:t> with 97.9% accuracy and F1, validated via Stratified 5-Fold CV and confirmed statistically superior to Linear SVM (McNemar's, p=0.00016, </a:t>
+            </a:r>
+            <a:r>
+              <a:rPr lang="el-GR" sz="1200" dirty="0">
                 <a:solidFill>
                   <a:srgbClr val="FFFFFF"/>
                 </a:solidFill>
@@ -5220,7 +5220,7 @@
                 <a:ea typeface="Calibri" pitchFamily="34" charset="-122"/>
                 <a:cs typeface="Calibri" pitchFamily="34" charset="-120"/>
               </a:rPr>
-              <a:t>McNemar's</a:t>
+              <a:t>α =0.05</a:t>
             </a:r>
             <a:r>
               <a:rPr lang="en-US" sz="1200" dirty="0">
@@ -5231,7 +5231,7 @@
                 <a:ea typeface="Calibri" pitchFamily="34" charset="-122"/>
                 <a:cs typeface="Calibri" pitchFamily="34" charset="-120"/>
               </a:rPr>
-              <a:t>, p=0.00016)</a:t>
+              <a:t>)</a:t>
             </a:r>
           </a:p>
           <a:p>

--- a/project_presentation.pptx
+++ b/project_presentation.pptx
@@ -2125,6 +2125,17 @@
               <a:buNone/>
             </a:pPr>
             <a:r>
+              <a:rPr lang="en-US" sz="1050">
+                <a:solidFill>
+                  <a:srgbClr val="4A6587"/>
+                </a:solidFill>
+                <a:latin typeface="Calibri" pitchFamily="34" charset="0"/>
+                <a:ea typeface="Calibri" pitchFamily="34" charset="-122"/>
+                <a:cs typeface="Calibri" pitchFamily="34" charset="-120"/>
+              </a:rPr>
+              <a:t>[13/06/2026</a:t>
+            </a:r>
+            <a:r>
               <a:rPr lang="en-US" sz="1050" dirty="0">
                 <a:solidFill>
                   <a:srgbClr val="4A6587"/>
@@ -2133,7 +2144,7 @@
                 <a:ea typeface="Calibri" pitchFamily="34" charset="-122"/>
                 <a:cs typeface="Calibri" pitchFamily="34" charset="-120"/>
               </a:rPr>
-              <a:t>[12/06/2026]</a:t>
+              <a:t>]</a:t>
             </a:r>
             <a:endParaRPr lang="en-US" sz="1050" dirty="0"/>
           </a:p>
@@ -2898,18 +2909,19 @@
                 <a:ea typeface="Calibri" pitchFamily="34" charset="-122"/>
                 <a:cs typeface="Calibri" pitchFamily="34" charset="-120"/>
               </a:rPr>
-              <a:t>Model uses meaningful source patterns (not noise)</a:t>
-            </a:r>
-          </a:p>
-          <a:p>
-            <a:pPr marL="628650" lvl="1" indent="-171450">
-              <a:spcAft>
-                <a:spcPts val="500"/>
-              </a:spcAft>
-              <a:buSzPct val="100000"/>
-              <a:buFontTx/>
-              <a:buChar char="-"/>
-            </a:pPr>
+              <a:t>Model learns </a:t>
+            </a:r>
+            <a:r>
+              <a:rPr lang="en-US" sz="1100" b="1" dirty="0">
+                <a:solidFill>
+                  <a:srgbClr val="1E293B"/>
+                </a:solidFill>
+                <a:latin typeface="Calibri" pitchFamily="34" charset="0"/>
+                <a:ea typeface="Calibri" pitchFamily="34" charset="-122"/>
+                <a:cs typeface="Calibri" pitchFamily="34" charset="-120"/>
+              </a:rPr>
+              <a:t>journalistically</a:t>
+            </a:r>
             <a:r>
               <a:rPr lang="en-US" sz="1100" dirty="0">
                 <a:solidFill>
@@ -2919,61 +2931,7 @@
                 <a:ea typeface="Calibri" pitchFamily="34" charset="-122"/>
                 <a:cs typeface="Calibri" pitchFamily="34" charset="-120"/>
               </a:rPr>
-              <a:t>Suggests learned distinction between </a:t>
-            </a:r>
-            <a:r>
-              <a:rPr lang="en-US" sz="1100" b="1" dirty="0">
-                <a:solidFill>
-                  <a:srgbClr val="1E293B"/>
-                </a:solidFill>
-                <a:latin typeface="Calibri" pitchFamily="34" charset="0"/>
-                <a:ea typeface="Calibri" pitchFamily="34" charset="-122"/>
-                <a:cs typeface="Calibri" pitchFamily="34" charset="-120"/>
-              </a:rPr>
-              <a:t>partisan</a:t>
-            </a:r>
-            <a:r>
-              <a:rPr lang="en-US" sz="1100" dirty="0">
-                <a:solidFill>
-                  <a:srgbClr val="1E293B"/>
-                </a:solidFill>
-                <a:latin typeface="Calibri" pitchFamily="34" charset="0"/>
-                <a:ea typeface="Calibri" pitchFamily="34" charset="-122"/>
-                <a:cs typeface="Calibri" pitchFamily="34" charset="-120"/>
-              </a:rPr>
-              <a:t> and </a:t>
-            </a:r>
-            <a:r>
-              <a:rPr lang="en-US" sz="1100" b="1" dirty="0">
-                <a:solidFill>
-                  <a:srgbClr val="1E293B"/>
-                </a:solidFill>
-                <a:latin typeface="Calibri" pitchFamily="34" charset="0"/>
-                <a:ea typeface="Calibri" pitchFamily="34" charset="-122"/>
-                <a:cs typeface="Calibri" pitchFamily="34" charset="-120"/>
-              </a:rPr>
-              <a:t>institutional sources</a:t>
-            </a:r>
-          </a:p>
-          <a:p>
-            <a:pPr marL="628650" lvl="1" indent="-171450">
-              <a:spcAft>
-                <a:spcPts val="500"/>
-              </a:spcAft>
-              <a:buSzPct val="100000"/>
-              <a:buFontTx/>
-              <a:buChar char="-"/>
-            </a:pPr>
-            <a:r>
-              <a:rPr lang="en-US" sz="1100" dirty="0">
-                <a:solidFill>
-                  <a:srgbClr val="1E293B"/>
-                </a:solidFill>
-                <a:latin typeface="Calibri" pitchFamily="34" charset="0"/>
-                <a:ea typeface="Calibri" pitchFamily="34" charset="-122"/>
-                <a:cs typeface="Calibri" pitchFamily="34" charset="-120"/>
-              </a:rPr>
-              <a:t>High accuracy (97.5%) suggests the model is learning meaningful signals</a:t>
+              <a:t> meaningful signals, not dataset artifacts.</a:t>
             </a:r>
           </a:p>
         </p:txBody>
@@ -3237,7 +3195,7 @@
                 <a:ea typeface="Calibri" pitchFamily="34" charset="-122"/>
                 <a:cs typeface="Calibri" pitchFamily="34" charset="-120"/>
               </a:rPr>
-              <a:t>: Article from October 2016 mentioning "president-elect", "Hillary", and "2016" — political content from the US election period, ground truth: True News (correctly classified)</a:t>
+              <a:t>: Article from October 2016 mentioning "president-elect", "Hillary", and "2016" — political content from the US election period, ground truth: Real News (correctly classified)</a:t>
             </a:r>
           </a:p>
           <a:p>
@@ -3334,7 +3292,7 @@
                 <a:ea typeface="Calibri" pitchFamily="34" charset="-122"/>
                 <a:cs typeface="Calibri" pitchFamily="34" charset="-120"/>
               </a:rPr>
-              <a:t>absent (value=0, +1.14) means the absence of this trusted token pushes toward real; </a:t>
+              <a:t>absent (value=0, +1.14) means the absence of this token pushes toward real; </a:t>
             </a:r>
             <a:r>
               <a:rPr lang="en-US" sz="1100" i="1" dirty="0" err="1">
@@ -3907,10 +3865,6 @@
               <a:buChar char="•"/>
             </a:pPr>
             <a:r>
-              <a:rPr lang="en-US" sz="1100" dirty="0"/>
-              <a:t> </a:t>
-            </a:r>
-            <a:r>
               <a:rPr lang="en-US" sz="1100" dirty="0">
                 <a:solidFill>
                   <a:srgbClr val="1E293B"/>
@@ -4047,11 +4001,8 @@
           <a:bodyPr wrap="square" lIns="0" tIns="0" rIns="0" bIns="0" rtlCol="0" anchor="ctr"/>
           <a:lstStyle/>
           <a:p>
-            <a:pPr marL="0" indent="0">
-              <a:buNone/>
-            </a:pPr>
-            <a:r>
-              <a:rPr lang="it-IT" sz="1100" b="1" dirty="0">
+            <a:r>
+              <a:rPr lang="en-US" sz="1100" dirty="0">
                 <a:solidFill>
                   <a:srgbClr val="1E293B"/>
                 </a:solidFill>
@@ -4059,10 +4010,10 @@
                 <a:ea typeface="Calibri" pitchFamily="34" charset="-122"/>
                 <a:cs typeface="Calibri" pitchFamily="34" charset="-120"/>
               </a:rPr>
-              <a:t>Verma</a:t>
-            </a:r>
-            <a:r>
-              <a:rPr lang="it-IT" sz="1100" dirty="0">
+              <a:t>Compared to Tian et al. (2025), which uses TF-IDF for ML and learned token representations for DL models, our </a:t>
+            </a:r>
+            <a:r>
+              <a:rPr lang="en-US" sz="1100" dirty="0" err="1">
                 <a:solidFill>
                   <a:srgbClr val="1E293B"/>
                 </a:solidFill>
@@ -4070,10 +4021,10 @@
                 <a:ea typeface="Calibri" pitchFamily="34" charset="-122"/>
                 <a:cs typeface="Calibri" pitchFamily="34" charset="-120"/>
               </a:rPr>
-              <a:t> et al. (2021) — the original WELFake paper — reports ~</a:t>
-            </a:r>
-            <a:r>
-              <a:rPr lang="it-IT" sz="1100" b="1" dirty="0">
+              <a:t>LightGBM</a:t>
+            </a:r>
+            <a:r>
+              <a:rPr lang="en-US" sz="1100" dirty="0">
                 <a:solidFill>
                   <a:srgbClr val="1E293B"/>
                 </a:solidFill>
@@ -4081,10 +4032,12 @@
                 <a:ea typeface="Calibri" pitchFamily="34" charset="-122"/>
                 <a:cs typeface="Calibri" pitchFamily="34" charset="-120"/>
               </a:rPr>
-              <a:t>95% accuracy </a:t>
-            </a:r>
-            <a:r>
-              <a:rPr lang="it-IT" sz="1100" dirty="0">
+              <a:t> </a:t>
+            </a:r>
+          </a:p>
+          <a:p>
+            <a:r>
+              <a:rPr lang="en-US" sz="1100" dirty="0">
                 <a:solidFill>
                   <a:srgbClr val="1E293B"/>
                 </a:solidFill>
@@ -4092,10 +4045,10 @@
                 <a:ea typeface="Calibri" pitchFamily="34" charset="-122"/>
                 <a:cs typeface="Calibri" pitchFamily="34" charset="-120"/>
               </a:rPr>
-              <a:t>using word embeddings combined with 20 hand-crafted linguistic features. Our LightGBM pipeline achieves </a:t>
-            </a:r>
-            <a:r>
-              <a:rPr lang="it-IT" sz="1100" b="1" dirty="0">
+              <a:t>Pipeline achieves </a:t>
+            </a:r>
+            <a:r>
+              <a:rPr lang="en-US" sz="1100" b="1" dirty="0">
                 <a:solidFill>
                   <a:srgbClr val="1E293B"/>
                 </a:solidFill>
@@ -4103,10 +4056,10 @@
                 <a:ea typeface="Calibri" pitchFamily="34" charset="-122"/>
                 <a:cs typeface="Calibri" pitchFamily="34" charset="-120"/>
               </a:rPr>
-              <a:t>97.9%</a:t>
-            </a:r>
-            <a:r>
-              <a:rPr lang="it-IT" sz="1100" dirty="0">
+              <a:t>97.5% </a:t>
+            </a:r>
+            <a:r>
+              <a:rPr lang="en-US" sz="1100" dirty="0">
                 <a:solidFill>
                   <a:srgbClr val="1E293B"/>
                 </a:solidFill>
@@ -4114,16 +4067,30 @@
                 <a:ea typeface="Calibri" pitchFamily="34" charset="-122"/>
                 <a:cs typeface="Calibri" pitchFamily="34" charset="-120"/>
               </a:rPr>
-              <a:t> with a simpler approach: TF-IDF + only 5 stylometric features. We outperform the dataset authors' own benchmark while maintaining full interpretability via SHAP.</a:t>
-            </a:r>
-            <a:endParaRPr lang="en-US" sz="1100" dirty="0">
-              <a:solidFill>
-                <a:srgbClr val="1E293B"/>
-              </a:solidFill>
-              <a:latin typeface="Calibri" pitchFamily="34" charset="0"/>
-              <a:ea typeface="Calibri" pitchFamily="34" charset="-122"/>
-              <a:cs typeface="Calibri" pitchFamily="34" charset="-120"/>
-            </a:endParaRPr>
+              <a:t>accuracy with TF-IDF + 5 stylometric features, while remaining </a:t>
+            </a:r>
+            <a:r>
+              <a:rPr lang="en-US" sz="1100" b="1" dirty="0">
+                <a:solidFill>
+                  <a:srgbClr val="1E293B"/>
+                </a:solidFill>
+                <a:latin typeface="Calibri" pitchFamily="34" charset="0"/>
+                <a:ea typeface="Calibri" pitchFamily="34" charset="-122"/>
+                <a:cs typeface="Calibri" pitchFamily="34" charset="-120"/>
+              </a:rPr>
+              <a:t>fully interpretable </a:t>
+            </a:r>
+            <a:r>
+              <a:rPr lang="en-US" sz="1100" dirty="0">
+                <a:solidFill>
+                  <a:srgbClr val="1E293B"/>
+                </a:solidFill>
+                <a:latin typeface="Calibri" pitchFamily="34" charset="0"/>
+                <a:ea typeface="Calibri" pitchFamily="34" charset="-122"/>
+                <a:cs typeface="Calibri" pitchFamily="34" charset="-120"/>
+              </a:rPr>
+              <a:t>via SHAP.</a:t>
+            </a:r>
           </a:p>
         </p:txBody>
       </p:sp>
@@ -4474,8 +4441,12 @@
               <a:buChar char="•"/>
             </a:pPr>
             <a:r>
+              <a:rPr lang="it-IT" sz="1050" b="1" dirty="0"/>
+              <a:t>First-pass filter</a:t>
+            </a:r>
+            <a:r>
               <a:rPr lang="it-IT" sz="1050" dirty="0"/>
-              <a:t>First-pass filter for content moderation, flags suspicious articles before publication or amplification.</a:t>
+              <a:t> for content moderation, flags suspicious articles before publication or amplification.</a:t>
             </a:r>
           </a:p>
           <a:p>
@@ -4707,7 +4678,23 @@
             </a:r>
             <a:r>
               <a:rPr lang="en-US" sz="1050" dirty="0"/>
-              <a:t> is English-only and US-politically skewed, generalization untested.</a:t>
+              <a:t> is</a:t>
+            </a:r>
+            <a:r>
+              <a:rPr lang="en-US" sz="1050" b="1" dirty="0"/>
+              <a:t> English-only </a:t>
+            </a:r>
+            <a:r>
+              <a:rPr lang="en-US" sz="1050" dirty="0"/>
+              <a:t>and </a:t>
+            </a:r>
+            <a:r>
+              <a:rPr lang="en-US" sz="1050" b="1" dirty="0"/>
+              <a:t>US-politically</a:t>
+            </a:r>
+            <a:r>
+              <a:rPr lang="en-US" sz="1050" dirty="0"/>
+              <a:t> skewed, generalization untested.</a:t>
             </a:r>
           </a:p>
           <a:p>
@@ -4720,7 +4707,15 @@
             </a:pPr>
             <a:r>
               <a:rPr lang="en-US" sz="1050" dirty="0"/>
-              <a:t>Static TF-IDF is vulnerable to concept drift; performance degrades without retraining.</a:t>
+              <a:t>Static TF-IDF is vulnerable to </a:t>
+            </a:r>
+            <a:r>
+              <a:rPr lang="en-US" sz="1050" b="1" dirty="0"/>
+              <a:t>concept drift</a:t>
+            </a:r>
+            <a:r>
+              <a:rPr lang="en-US" sz="1050" dirty="0"/>
+              <a:t>; performance degrades without retraining.</a:t>
             </a:r>
           </a:p>
           <a:p>
@@ -4935,7 +4930,15 @@
             </a:pPr>
             <a:r>
               <a:rPr lang="en-US" sz="1050" dirty="0"/>
-              <a:t>Replace TF-IDF with contextual embeddings (BERT) for deeper semantic understanding.</a:t>
+              <a:t>Replace TF-IDF with contextual embeddings (</a:t>
+            </a:r>
+            <a:r>
+              <a:rPr lang="en-US" sz="1050" b="1" dirty="0"/>
+              <a:t>BERT</a:t>
+            </a:r>
+            <a:r>
+              <a:rPr lang="en-US" sz="1050" dirty="0"/>
+              <a:t>) for deeper semantic understanding.</a:t>
             </a:r>
           </a:p>
           <a:p>
@@ -4948,7 +4951,15 @@
             </a:pPr>
             <a:r>
               <a:rPr lang="en-US" sz="1050" dirty="0"/>
-              <a:t>Integrate fact-checking APIs to cross-reference claims against verified databases.</a:t>
+              <a:t>Integrate </a:t>
+            </a:r>
+            <a:r>
+              <a:rPr lang="en-US" sz="1050" b="1" dirty="0"/>
+              <a:t>fact-checking APIs </a:t>
+            </a:r>
+            <a:r>
+              <a:rPr lang="en-US" sz="1050" dirty="0"/>
+              <a:t>to cross-reference claims against verified databases.</a:t>
             </a:r>
           </a:p>
           <a:p>
@@ -4974,7 +4985,15 @@
             </a:pPr>
             <a:r>
               <a:rPr lang="en-US" sz="1050" dirty="0"/>
-              <a:t>Deploy with human-in-the-loop feedback to measure calibration and detect drift.</a:t>
+              <a:t>Deploy with</a:t>
+            </a:r>
+            <a:r>
+              <a:rPr lang="en-US" sz="1050" b="1" dirty="0"/>
+              <a:t> human feedback</a:t>
+            </a:r>
+            <a:r>
+              <a:rPr lang="en-US" sz="1050" dirty="0"/>
+              <a:t> to measure calibration and detect drift.</a:t>
             </a:r>
             <a:endParaRPr lang="en-US" sz="1050" dirty="0">
               <a:solidFill>
@@ -5209,10 +5228,10 @@
                 <a:ea typeface="Calibri" pitchFamily="34" charset="-122"/>
                 <a:cs typeface="Calibri" pitchFamily="34" charset="-120"/>
               </a:rPr>
-              <a:t> with 97.9% accuracy and F1, validated via Stratified 5-Fold CV and confirmed statistically superior to Linear SVM (McNemar's, p=0.00016, </a:t>
-            </a:r>
-            <a:r>
-              <a:rPr lang="el-GR" sz="1200" dirty="0">
+              <a:t> with 97.5% accuracy and F1, validated via Stratified 5-Fold CV and confirmed statistically superior to Linear SVM (</a:t>
+            </a:r>
+            <a:r>
+              <a:rPr lang="en-US" sz="1200" dirty="0" err="1">
                 <a:solidFill>
                   <a:srgbClr val="FFFFFF"/>
                 </a:solidFill>
@@ -5220,7 +5239,7 @@
                 <a:ea typeface="Calibri" pitchFamily="34" charset="-122"/>
                 <a:cs typeface="Calibri" pitchFamily="34" charset="-120"/>
               </a:rPr>
-              <a:t>α =0.05</a:t>
+              <a:t>McNemar's</a:t>
             </a:r>
             <a:r>
               <a:rPr lang="en-US" sz="1200" dirty="0">
@@ -5231,7 +5250,7 @@
                 <a:ea typeface="Calibri" pitchFamily="34" charset="-122"/>
                 <a:cs typeface="Calibri" pitchFamily="34" charset="-120"/>
               </a:rPr>
-              <a:t>)</a:t>
+              <a:t>, p=0.00001)</a:t>
             </a:r>
           </a:p>
           <a:p>
